--- a/lectures/week-07/lecture-bi.pptx
+++ b/lectures/week-07/lecture-bi.pptx
@@ -24333,7 +24333,7 @@
                           </a:solidFill>
                           <a:latin typeface="Source Han Sans SC"/>
                         </a:rPr>
-                        <a:t>1 898</a:t>
+                        <a:t>1,898</a:t>
                       </a:r>
                     </a:p>
                   </a:txBody>
@@ -24499,7 +24499,7 @@
                           </a:solidFill>
                           <a:latin typeface="Source Han Sans SC"/>
                         </a:rPr>
-                        <a:t>1 898</a:t>
+                        <a:t>1,898</a:t>
                       </a:r>
                     </a:p>
                   </a:txBody>
@@ -26814,7 +26814,7 @@
                           </a:solidFill>
                           <a:latin typeface="Source Han Sans SC"/>
                         </a:rPr>
-                        <a:t>17 226</a:t>
+                        <a:t>17,226</a:t>
                       </a:r>
                     </a:p>
                   </a:txBody>
@@ -26942,7 +26942,7 @@
                           </a:solidFill>
                           <a:latin typeface="Source Han Sans SC"/>
                         </a:rPr>
-                        <a:t>1 898</a:t>
+                        <a:t>1,898</a:t>
                       </a:r>
                     </a:p>
                   </a:txBody>
@@ -27070,7 +27070,7 @@
                           </a:solidFill>
                           <a:latin typeface="Source Han Sans SC"/>
                         </a:rPr>
-                        <a:t>21 312</a:t>
+                        <a:t>21,312</a:t>
                       </a:r>
                     </a:p>
                   </a:txBody>
@@ -27198,7 +27198,7 @@
                           </a:solidFill>
                           <a:latin typeface="Source Han Sans SC"/>
                         </a:rPr>
-                        <a:t>1 898</a:t>
+                        <a:t>1,898</a:t>
                       </a:r>
                     </a:p>
                   </a:txBody>
@@ -27326,7 +27326,7 @@
                           </a:solidFill>
                           <a:latin typeface="Source Han Sans SC"/>
                         </a:rPr>
-                        <a:t>1 898</a:t>
+                        <a:t>1,898</a:t>
                       </a:r>
                     </a:p>
                   </a:txBody>
@@ -27460,7 +27460,7 @@
                 </a:solidFill>
                 <a:latin typeface="Source Han Sans SC"/>
               </a:rPr>
-              <a:t>三件事：① 卷积与全连接的测试差 0.002 &lt; 一个标准差 0.008 → **写「未观察到显著差异」**，不写「卷积更好」。② 变宽（21 312 参数）确实更好，0.987，但它已经比全连接还大——你付出的是参数。③ 增强单独看是**变差**的：0.981 → 0.950。下一页解释为什么这不是失败。</a:t>
+              <a:t>三件事：① 卷积与全连接的测试差 0.002 &lt; 一个标准差 0.008 → **写「未观察到显著差异」**，不写「卷积更好」。② 变宽（21,312 参数）确实更好，0.987，但它已经比全连接还大——你付出的是参数。③ 增强单独看是**变差**的：0.981 → 0.950。下一页解释为什么这不是失败。</a:t>
             </a:r>
           </a:p>
         </p:txBody>
@@ -28889,7 +28889,7 @@
                 </a:solidFill>
                 <a:latin typeface="Source Han Sans SC"/>
               </a:rPr>
-              <a:t>为什么图像不能直接铺平 · 参数量对比 17 226 → 1 898</a:t>
+              <a:t>为什么图像不能直接铺平 · 参数量对比 17,226 → 1,898</a:t>
             </a:r>
           </a:p>
         </p:txBody>
@@ -43483,7 +43483,7 @@
                 </a:solidFill>
                 <a:latin typeface="Source Han Sans SC"/>
               </a:rPr>
-              <a:t>• 17 226 参数拿 0.979，1 898 参数拿 0.981。多出来的 15 328 个参数，在训练和推理里都要算、要传、要供电。</a:t>
+              <a:t>• 17,226 参数拿 0.979，1,898 参数拿 0.981。多出来的 15,328 个参数，在训练和推理里都要算、要传、要供电。</a:t>
             </a:r>
           </a:p>
           <a:p>
@@ -45989,7 +45989,7 @@
                 </a:solidFill>
                 <a:latin typeface="Source Han Sans SC"/>
               </a:rPr>
-              <a:t>本周卷积网 1 898 参数拿到 0.981，全连接 17 226 拿到 0.979。写「卷积更好」对不对？该怎么说？</a:t>
+              <a:t>本周卷积网 1,898 参数拿到 0.981，全连接 17,226 拿到 0.979。写「卷积更好」对不对？该怎么说？</a:t>
             </a:r>
           </a:p>
         </p:txBody>
@@ -50154,7 +50154,7 @@
                 </a:solidFill>
                 <a:latin typeface="Source Han Sans SC"/>
               </a:rPr>
-              <a:t>• 同一份 digits 数据上，全连接网 17 226 个参数，两层卷积只要 1 898 个。</a:t>
+              <a:t>• 同一份 digits 数据上，全连接网 17,226 个参数，两层卷积只要 1,898 个。</a:t>
             </a:r>
           </a:p>
           <a:p>
@@ -59140,7 +59140,7 @@
                           </a:solidFill>
                           <a:latin typeface="Source Han Sans SC"/>
                         </a:rPr>
-                        <a:t>8 320</a:t>
+                        <a:t>8,320</a:t>
                       </a:r>
                     </a:p>
                   </a:txBody>
@@ -59162,7 +59162,7 @@
                           </a:solidFill>
                           <a:latin typeface="Source Han Sans SC"/>
                         </a:rPr>
-                        <a:t>8 320</a:t>
+                        <a:t>8,320</a:t>
                       </a:r>
                     </a:p>
                   </a:txBody>
@@ -59246,7 +59246,7 @@
                           </a:solidFill>
                           <a:latin typeface="Source Han Sans SC"/>
                         </a:rPr>
-                        <a:t>8 256</a:t>
+                        <a:t>8,256</a:t>
                       </a:r>
                     </a:p>
                   </a:txBody>
@@ -59268,7 +59268,7 @@
                           </a:solidFill>
                           <a:latin typeface="Source Han Sans SC"/>
                         </a:rPr>
-                        <a:t>16 576</a:t>
+                        <a:t>16,576</a:t>
                       </a:r>
                     </a:p>
                   </a:txBody>
@@ -59374,7 +59374,7 @@
                           </a:solidFill>
                           <a:latin typeface="Source Han Sans SC"/>
                         </a:rPr>
-                        <a:t>17 226</a:t>
+                        <a:t>17,226</a:t>
                       </a:r>
                     </a:p>
                   </a:txBody>
@@ -59596,7 +59596,7 @@
                           </a:solidFill>
                           <a:latin typeface="Source Han Sans SC"/>
                         </a:rPr>
-                        <a:t>1 168</a:t>
+                        <a:t>1,168</a:t>
                       </a:r>
                     </a:p>
                   </a:txBody>
@@ -59618,7 +59618,7 @@
                           </a:solidFill>
                           <a:latin typeface="Source Han Sans SC"/>
                         </a:rPr>
-                        <a:t>1 248</a:t>
+                        <a:t>1,248</a:t>
                       </a:r>
                     </a:p>
                   </a:txBody>
@@ -59724,7 +59724,7 @@
                           </a:solidFill>
                           <a:latin typeface="Source Han Sans SC"/>
                         </a:rPr>
-                        <a:t>1 898</a:t>
+                        <a:t>1,898</a:t>
                       </a:r>
                     </a:p>
                   </a:txBody>
@@ -59792,7 +59792,7 @@
                 </a:solidFill>
                 <a:latin typeface="Source Han Sans SC"/>
               </a:rPr>
-              <a:t>上半是本周对照用的全连接网，下半是两层卷积加一个线性头。17 226 → 1 898，少 9 倍；而两者的测试准确率是 0.979 与 0.981——差 0.002，不到一个标准差（0.008）。</a:t>
+              <a:t>上半是本周对照用的全连接网，下半是两层卷积加一个线性头。17,226 → 1,898，少 9 倍；而两者的测试准确率是 0.979 与 0.981——差 0.002，不到一个标准差（0.008）。</a:t>
             </a:r>
           </a:p>
         </p:txBody>
